--- a/curso_es/pptx/S06.pptx
+++ b/curso_es/pptx/S06.pptx
@@ -4229,7 +4229,7 @@
                 </a:solidFill>
                 <a:latin typeface="Nunito Sans"/>
               </a:rPr>
-              <a:t>Iker lee en Instagram: «El agua con limón en ayunas quema grasa. Lo dice una influencer de fitness y lo hace todo mi gimnasio». Iker está seguro de que es verdad.</a:t>
+              <a:t>Un chico lee en Instagram: «El agua con limón en ayunas quema grasa. Lo dice una influencer de fitness y lo hace todo mi gimnasio». Está seguro de que es verdad.</a:t>
             </a:r>
           </a:p>
         </p:txBody>
@@ -4327,7 +4327,7 @@
                 </a:solidFill>
                 <a:latin typeface="Nunito Sans"/>
               </a:rPr>
-              <a:t>¿Lo sabe Iker? No: estar seguro no basta. Le faltan buenas razones.</a:t>
+              <a:t>¿Lo sabe? No: estar seguro no basta. Le faltan buenas razones.</a:t>
             </a:r>
           </a:p>
           <a:p>
@@ -4538,7 +4538,7 @@
                 </a:solidFill>
                 <a:latin typeface="Nunito Sans"/>
               </a:rPr>
-              <a:t>Omar: «Sé seguro que el agua con limón adelgaza. Lo he visto en un vídeo con tres millones de visitas».</a:t>
+              <a:t>Un chico: «Sé seguro que el agua con limón adelgaza. Lo he visto en un vídeo con tres millones de visitas».</a:t>
             </a:r>
           </a:p>
         </p:txBody>
